--- a/최종발표/NLP2팀.pptx
+++ b/최종발표/NLP2팀.pptx
@@ -246,7 +246,7 @@
       <p15:sldGuideLst xmlns:p15="http://schemas.microsoft.com/office/powerpoint/2012/main"/>
     </p:ext>
     <p:ext uri="GoogleSlidesCustomDataVersion2">
-      <go:slidesCustomData xmlns="" xmlns:mc="http://schemas.openxmlformats.org/markup-compatibility/2006" xmlns:mv="urn:schemas-microsoft-com:mac:vml" xmlns:c="http://schemas.openxmlformats.org/drawingml/2006/chart" xmlns:dgm="http://schemas.openxmlformats.org/drawingml/2006/diagram" xmlns:o="urn:schemas-microsoft-com:office:office" xmlns:v="urn:schemas-microsoft-com:vml" xmlns:pvml="urn:schemas-microsoft-com:office:powerpoint" xmlns:com="http://schemas.openxmlformats.org/drawingml/2006/compatibility" xmlns:p14="http://schemas.microsoft.com/office/powerpoint/2010/main" xmlns:p15="http://schemas.microsoft.com/office/powerpoint/2012/main" xmlns:ahyp="http://schemas.microsoft.com/office/drawing/2018/hyperlinkcolor" xmlns:go="http://customooxmlschemas.google.com/" r:id="rId6" roundtripDataSignature="AMtx7mj3DEpEy1lW+IknwrV0K5B00CCi3g=="/>
+      <go:slidesCustomData xmlns:go="http://customooxmlschemas.google.com/" xmlns:ahyp="http://schemas.microsoft.com/office/drawing/2018/hyperlinkcolor" xmlns:p15="http://schemas.microsoft.com/office/powerpoint/2012/main" xmlns:p14="http://schemas.microsoft.com/office/powerpoint/2010/main" xmlns:com="http://schemas.openxmlformats.org/drawingml/2006/compatibility" xmlns:pvml="urn:schemas-microsoft-com:office:powerpoint" xmlns:v="urn:schemas-microsoft-com:vml" xmlns:o="urn:schemas-microsoft-com:office:office" xmlns:dgm="http://schemas.openxmlformats.org/drawingml/2006/diagram" xmlns:c="http://schemas.openxmlformats.org/drawingml/2006/chart" xmlns:mv="urn:schemas-microsoft-com:mac:vml" xmlns:mc="http://schemas.openxmlformats.org/markup-compatibility/2006" xmlns="" r:id="rId6" roundtripDataSignature="AMtx7mj3DEpEy1lW+IknwrV0K5B00CCi3g=="/>
     </p:ext>
   </p:extLst>
 </p:presentation>
@@ -9583,12 +9583,8 @@
               <a:rPr lang="en-US" altLang="ko-KR" sz="5400" dirty="0"/>
             </a:br>
             <a:r>
-              <a:rPr lang="en-US" altLang="ko-KR" sz="5400" dirty="0" err="1"/>
-              <a:t>Recomp</a:t>
-            </a:r>
-            <a:r>
               <a:rPr lang="ko-KR" altLang="en-US" sz="5400" dirty="0"/>
-              <a:t>는 검색 문서를 압축해 모델에 제공하지만 원문을 제거하지 않고 </a:t>
+              <a:t>검색 문서를 압축해 모델에 제공하는 동시에 원문을 제거하지 않고 </a:t>
             </a:r>
             <a:r>
               <a:rPr lang="ko-KR" altLang="en-US" sz="5400" dirty="0" err="1"/>
